--- a/assets/pptx/catalog-342.pptx
+++ b/assets/pptx/catalog-342.pptx
@@ -3267,7 +3267,7 @@
                 <a:ea typeface="Ebrima"/>
                 <a:cs typeface="Ebrima"/>
               </a:rPr>
-              <a:t>ትመቸኛለህ ኢየሱስ (8x)</a:t>
+              <a:t>ትመቸኛለህ ኢየሱስ 8x</a:t>
             </a:r>
           </a:p>
         </p:txBody>
@@ -3352,7 +3352,7 @@
                 <a:ea typeface="Ebrima"/>
                 <a:cs typeface="Ebrima"/>
               </a:rPr>
-              <a:t>ትመቸኛለህ ኢየሱስ (2x)</a:t>
+              <a:t>ትመቸኛለህ ኢየሱስ 2x</a:t>
             </a:r>
           </a:p>
         </p:txBody>
@@ -3473,7 +3473,7 @@
                 <a:ea typeface="Ebrima"/>
                 <a:cs typeface="Ebrima"/>
               </a:rPr>
-              <a:t>የኽው ተስፋ ያለው ሠው አረከኝ ህይወቴ ሰከነ (2x)</a:t>
+              <a:t>የኽው ተስፋ ያለው ሠው አረከኝ ህይወቴ ሰከነ 2x</a:t>
             </a:r>
           </a:p>
         </p:txBody>
@@ -3558,7 +3558,7 @@
                 <a:ea typeface="Ebrima"/>
                 <a:cs typeface="Ebrima"/>
               </a:rPr>
-              <a:t>ትመቸኛለህ ኢየሱስ (4x)</a:t>
+              <a:t>ትመቸኛለህ ኢየሱስ 4x</a:t>
             </a:r>
           </a:p>
         </p:txBody>
@@ -3764,7 +3764,7 @@
                 <a:ea typeface="Ebrima"/>
                 <a:cs typeface="Ebrima"/>
               </a:rPr>
-              <a:t>ትመቸኛለህ ኢየሱስ (4x)</a:t>
+              <a:t>ትመቸኛለህ ኢየሱስ 4x</a:t>
             </a:r>
           </a:p>
         </p:txBody>
@@ -3970,7 +3970,7 @@
                 <a:ea typeface="Ebrima"/>
                 <a:cs typeface="Ebrima"/>
               </a:rPr>
-              <a:t>ትመቸኛለህ ኢየሱስ (4x)</a:t>
+              <a:t>ትመቸኛለህ ኢየሱስ 4x</a:t>
             </a:r>
           </a:p>
         </p:txBody>
